--- a/psoft-tools/PosterPresentations.com-36x48-Template-Aragon.pptx
+++ b/psoft-tools/PosterPresentations.com-36x48-Template-Aragon.pptx
@@ -256,7 +256,7 @@
             <a:fld id="{0158C5BC-9A70-462C-B28D-9600239EAC64}" type="datetimeFigureOut">
               <a:rPr lang="en-US" smtClean="0"/>
               <a:pPr/>
-              <a:t>5/28/22</a:t>
+              <a:t>8/6/2024</a:t>
             </a:fld>
             <a:endParaRPr lang="en-US"/>
           </a:p>
@@ -423,7 +423,7 @@
             <a:fld id="{E6CC2317-6751-4CD4-9995-8782DD78E936}" type="datetimeFigureOut">
               <a:rPr lang="en-US" smtClean="0"/>
               <a:pPr/>
-              <a:t>5/28/22</a:t>
+              <a:t>8/6/2024</a:t>
             </a:fld>
             <a:endParaRPr lang="en-US" dirty="0"/>
           </a:p>
@@ -6681,12 +6681,82 @@
             <p:ph type="body" sz="quarter" idx="10"/>
           </p:nvPr>
         </p:nvSpPr>
-        <p:spPr/>
+        <p:spPr>
+          <a:xfrm>
+            <a:off x="459674" y="5696931"/>
+            <a:ext cx="10056813" cy="9436407"/>
+          </a:xfrm>
+        </p:spPr>
         <p:txBody>
           <a:bodyPr/>
           <a:lstStyle/>
           <a:p>
-            <a:endParaRPr lang="en-US"/>
+            <a:r>
+              <a:rPr lang="en-US" sz="4800" dirty="0"/>
+              <a:t>Our accomplishments this semester</a:t>
+            </a:r>
+          </a:p>
+          <a:p>
+            <a:pPr marL="285750" indent="-285750">
+              <a:buFont typeface="Arial" panose="020B0604020202020204" pitchFamily="34" charset="0"/>
+              <a:buChar char="•"/>
+            </a:pPr>
+            <a:r>
+              <a:rPr lang="en-US" sz="4800" dirty="0"/>
+              <a:t>Changed the overall theme of the website to look closer to the </a:t>
+            </a:r>
+            <a:r>
+              <a:rPr lang="en-US" sz="4800" dirty="0" err="1"/>
+              <a:t>PSoft</a:t>
+            </a:r>
+            <a:r>
+              <a:rPr lang="en-US" sz="4800" dirty="0"/>
+              <a:t> website</a:t>
+            </a:r>
+          </a:p>
+          <a:p>
+            <a:pPr marL="285750" indent="-285750">
+              <a:buFont typeface="Arial" panose="020B0604020202020204" pitchFamily="34" charset="0"/>
+              <a:buChar char="•"/>
+            </a:pPr>
+            <a:r>
+              <a:rPr lang="en-US" sz="4800" dirty="0"/>
+              <a:t>Added pages for design patterns</a:t>
+            </a:r>
+          </a:p>
+          <a:p>
+            <a:pPr marL="285750" indent="-285750">
+              <a:buFont typeface="Arial" panose="020B0604020202020204" pitchFamily="34" charset="0"/>
+              <a:buChar char="•"/>
+            </a:pPr>
+            <a:r>
+              <a:rPr lang="en-US" sz="4800" dirty="0"/>
+              <a:t>Changed the formatting of Hoare Triple output</a:t>
+            </a:r>
+          </a:p>
+          <a:p>
+            <a:pPr marL="285750" indent="-285750">
+              <a:buFont typeface="Arial" panose="020B0604020202020204" pitchFamily="34" charset="0"/>
+              <a:buChar char="•"/>
+            </a:pPr>
+            <a:r>
+              <a:rPr lang="en-US" sz="4800" dirty="0"/>
+              <a:t>Began working on new logo</a:t>
+            </a:r>
+          </a:p>
+          <a:p>
+            <a:pPr marL="285750" indent="-285750">
+              <a:buFont typeface="Arial" panose="020B0604020202020204" pitchFamily="34" charset="0"/>
+              <a:buChar char="•"/>
+            </a:pPr>
+            <a:endParaRPr lang="en-US" sz="3600" dirty="0"/>
+          </a:p>
+          <a:p>
+            <a:pPr marL="285750" indent="-285750">
+              <a:buFont typeface="Arial" panose="020B0604020202020204" pitchFamily="34" charset="0"/>
+              <a:buChar char="•"/>
+            </a:pPr>
+            <a:endParaRPr lang="en-US" dirty="0"/>
           </a:p>
         </p:txBody>
       </p:sp>
@@ -6711,7 +6781,10 @@
           <a:bodyPr/>
           <a:lstStyle/>
           <a:p>
-            <a:endParaRPr lang="en-US"/>
+            <a:r>
+              <a:rPr lang="en-US" dirty="0"/>
+              <a:t>FRONT END </a:t>
+            </a:r>
           </a:p>
         </p:txBody>
       </p:sp>
@@ -6731,12 +6804,20 @@
             <p:ph type="body" sz="quarter" idx="20"/>
           </p:nvPr>
         </p:nvSpPr>
-        <p:spPr/>
+        <p:spPr>
+          <a:xfrm>
+            <a:off x="448858" y="16340688"/>
+            <a:ext cx="10050462" cy="615545"/>
+          </a:xfrm>
+        </p:spPr>
         <p:txBody>
           <a:bodyPr/>
           <a:lstStyle/>
           <a:p>
-            <a:endParaRPr lang="en-US"/>
+            <a:r>
+              <a:rPr lang="en-US" dirty="0"/>
+              <a:t>FUTURE PLANS</a:t>
+            </a:r>
           </a:p>
         </p:txBody>
       </p:sp>
@@ -6756,12 +6837,98 @@
             <p:ph type="body" sz="quarter" idx="21"/>
           </p:nvPr>
         </p:nvSpPr>
-        <p:spPr/>
+        <p:spPr>
+          <a:xfrm>
+            <a:off x="11460161" y="5829841"/>
+            <a:ext cx="10048874" cy="10679825"/>
+          </a:xfrm>
+        </p:spPr>
         <p:txBody>
           <a:bodyPr/>
           <a:lstStyle/>
           <a:p>
-            <a:endParaRPr lang="en-US"/>
+            <a:pPr algn="ctr"/>
+            <a:r>
+              <a:rPr lang="en-US" sz="4000" dirty="0"/>
+              <a:t>Interactive Web Tools for Students Taking Principles of Software</a:t>
+            </a:r>
+          </a:p>
+          <a:p>
+            <a:r>
+              <a:rPr lang="en-US" sz="4000" b="1" dirty="0"/>
+              <a:t>Tech Stack</a:t>
+            </a:r>
+          </a:p>
+          <a:p>
+            <a:r>
+              <a:rPr lang="en-US" sz="4000" dirty="0"/>
+              <a:t>Front end: React, </a:t>
+            </a:r>
+            <a:r>
+              <a:rPr lang="en-US" sz="4000" dirty="0" err="1"/>
+              <a:t>Vite</a:t>
+            </a:r>
+            <a:r>
+              <a:rPr lang="en-US" sz="4000" dirty="0"/>
+              <a:t>, Tailwind</a:t>
+            </a:r>
+          </a:p>
+          <a:p>
+            <a:r>
+              <a:rPr lang="en-US" sz="4000" dirty="0"/>
+              <a:t>Back end: Express.js</a:t>
+            </a:r>
+          </a:p>
+          <a:p>
+            <a:r>
+              <a:rPr lang="en-US" sz="4000" b="1" dirty="0"/>
+              <a:t>Goals</a:t>
+            </a:r>
+          </a:p>
+          <a:p>
+            <a:pPr marL="571500" indent="-571500">
+              <a:buFont typeface="Arial" panose="020B0604020202020204" pitchFamily="34" charset="0"/>
+              <a:buChar char="•"/>
+            </a:pPr>
+            <a:r>
+              <a:rPr lang="en-US" sz="4000" dirty="0"/>
+              <a:t>Provide a useful tool for students taking </a:t>
+            </a:r>
+            <a:r>
+              <a:rPr lang="en-US" sz="4000" dirty="0" err="1"/>
+              <a:t>Psoft</a:t>
+            </a:r>
+            <a:endParaRPr lang="en-US" sz="4000" dirty="0"/>
+          </a:p>
+          <a:p>
+            <a:pPr marL="571500" indent="-571500">
+              <a:buFont typeface="Arial" panose="020B0604020202020204" pitchFamily="34" charset="0"/>
+              <a:buChar char="•"/>
+            </a:pPr>
+            <a:r>
+              <a:rPr lang="en-US" sz="4000" dirty="0"/>
+              <a:t>Implement tools for Hoare triples, forward and backwards reasoning, and CFGs</a:t>
+            </a:r>
+          </a:p>
+          <a:p>
+            <a:pPr marL="571500" indent="-571500">
+              <a:buFont typeface="Arial" panose="020B0604020202020204" pitchFamily="34" charset="0"/>
+              <a:buChar char="•"/>
+            </a:pPr>
+            <a:r>
+              <a:rPr lang="en-US" sz="4000" dirty="0"/>
+              <a:t>Host the website on a server so it can be accessed by students</a:t>
+            </a:r>
+          </a:p>
+          <a:p>
+            <a:pPr marL="571500" indent="-571500">
+              <a:buFont typeface="Arial" panose="020B0604020202020204" pitchFamily="34" charset="0"/>
+              <a:buChar char="•"/>
+            </a:pPr>
+            <a:r>
+              <a:rPr lang="en-US" sz="4000" dirty="0"/>
+              <a:t>Improve the appearance of the website</a:t>
+            </a:r>
           </a:p>
         </p:txBody>
       </p:sp>
@@ -6786,7 +6953,10 @@
           <a:bodyPr/>
           <a:lstStyle/>
           <a:p>
-            <a:endParaRPr lang="en-US"/>
+            <a:r>
+              <a:rPr lang="en-US" dirty="0"/>
+              <a:t>PSOFT TOOLS</a:t>
+            </a:r>
           </a:p>
         </p:txBody>
       </p:sp>
@@ -6806,12 +6976,47 @@
             <p:ph type="body" sz="quarter" idx="23"/>
           </p:nvPr>
         </p:nvSpPr>
-        <p:spPr/>
+        <p:spPr>
+          <a:xfrm>
+            <a:off x="22377404" y="5829841"/>
+            <a:ext cx="10048874" cy="3502475"/>
+          </a:xfrm>
+        </p:spPr>
         <p:txBody>
           <a:bodyPr/>
           <a:lstStyle/>
           <a:p>
-            <a:endParaRPr lang="en-US"/>
+            <a:r>
+              <a:rPr lang="en-US" sz="4000" dirty="0"/>
+              <a:t>Our accomplishments this semester</a:t>
+            </a:r>
+          </a:p>
+          <a:p>
+            <a:pPr marL="285750" indent="-285750">
+              <a:buFont typeface="Arial" panose="020B0604020202020204" pitchFamily="34" charset="0"/>
+              <a:buChar char="•"/>
+            </a:pPr>
+            <a:r>
+              <a:rPr lang="en-US" sz="4000" dirty="0"/>
+              <a:t>Completed Hoare Triple verification</a:t>
+            </a:r>
+          </a:p>
+          <a:p>
+            <a:pPr marL="285750" indent="-285750">
+              <a:buFont typeface="Arial" panose="020B0604020202020204" pitchFamily="34" charset="0"/>
+              <a:buChar char="•"/>
+            </a:pPr>
+            <a:r>
+              <a:rPr lang="en-US" sz="4000" dirty="0"/>
+              <a:t>Started forward and backwards reasoning</a:t>
+            </a:r>
+          </a:p>
+          <a:p>
+            <a:pPr marL="285750" indent="-285750">
+              <a:buFont typeface="Arial" panose="020B0604020202020204" pitchFamily="34" charset="0"/>
+              <a:buChar char="•"/>
+            </a:pPr>
+            <a:endParaRPr lang="en-US" dirty="0"/>
           </a:p>
         </p:txBody>
       </p:sp>
@@ -6836,57 +7041,10 @@
           <a:bodyPr/>
           <a:lstStyle/>
           <a:p>
-            <a:endParaRPr lang="en-US"/>
-          </a:p>
-        </p:txBody>
-      </p:sp>
-      <p:sp>
-        <p:nvSpPr>
-          <p:cNvPr id="9" name="Text Placeholder 8">
-            <a:extLst>
-              <a:ext uri="{FF2B5EF4-FFF2-40B4-BE49-F238E27FC236}">
-                <a16:creationId xmlns:a16="http://schemas.microsoft.com/office/drawing/2014/main" id="{109607D9-8986-46BB-4981-8DFFD1929625}"/>
-              </a:ext>
-            </a:extLst>
-          </p:cNvPr>
-          <p:cNvSpPr>
-            <a:spLocks noGrp="1"/>
-          </p:cNvSpPr>
-          <p:nvPr>
-            <p:ph type="body" sz="quarter" idx="25"/>
-          </p:nvPr>
-        </p:nvSpPr>
-        <p:spPr/>
-        <p:txBody>
-          <a:bodyPr/>
-          <a:lstStyle/>
-          <a:p>
-            <a:endParaRPr lang="en-US"/>
-          </a:p>
-        </p:txBody>
-      </p:sp>
-      <p:sp>
-        <p:nvSpPr>
-          <p:cNvPr id="10" name="Text Placeholder 9">
-            <a:extLst>
-              <a:ext uri="{FF2B5EF4-FFF2-40B4-BE49-F238E27FC236}">
-                <a16:creationId xmlns:a16="http://schemas.microsoft.com/office/drawing/2014/main" id="{BD8D252B-839A-3EC0-1EEA-A62A153F85EC}"/>
-              </a:ext>
-            </a:extLst>
-          </p:cNvPr>
-          <p:cNvSpPr>
-            <a:spLocks noGrp="1"/>
-          </p:cNvSpPr>
-          <p:nvPr>
-            <p:ph type="body" sz="quarter" idx="26"/>
-          </p:nvPr>
-        </p:nvSpPr>
-        <p:spPr/>
-        <p:txBody>
-          <a:bodyPr/>
-          <a:lstStyle/>
-          <a:p>
-            <a:endParaRPr lang="en-US"/>
+            <a:r>
+              <a:rPr lang="en-US" dirty="0"/>
+              <a:t>BACK END</a:t>
+            </a:r>
           </a:p>
         </p:txBody>
       </p:sp>
@@ -6906,12 +7064,20 @@
             <p:ph type="body" sz="quarter" idx="27"/>
           </p:nvPr>
         </p:nvSpPr>
-        <p:spPr/>
+        <p:spPr>
+          <a:xfrm>
+            <a:off x="33844182" y="4981628"/>
+            <a:ext cx="10047018" cy="615545"/>
+          </a:xfrm>
+        </p:spPr>
         <p:txBody>
           <a:bodyPr/>
           <a:lstStyle/>
           <a:p>
-            <a:endParaRPr lang="en-US"/>
+            <a:r>
+              <a:rPr lang="en-US" dirty="0"/>
+              <a:t>CHALLENGES</a:t>
+            </a:r>
           </a:p>
         </p:txBody>
       </p:sp>
@@ -6931,12 +7097,51 @@
             <p:ph type="body" sz="quarter" idx="28"/>
           </p:nvPr>
         </p:nvSpPr>
-        <p:spPr/>
+        <p:spPr>
+          <a:xfrm>
+            <a:off x="33844182" y="6072120"/>
+            <a:ext cx="10052050" cy="6370953"/>
+          </a:xfrm>
+        </p:spPr>
         <p:txBody>
           <a:bodyPr/>
           <a:lstStyle/>
           <a:p>
-            <a:endParaRPr lang="en-US"/>
+            <a:pPr marL="285750" indent="-285750">
+              <a:buFont typeface="Arial" panose="020B0604020202020204" pitchFamily="34" charset="0"/>
+              <a:buChar char="•"/>
+            </a:pPr>
+            <a:r>
+              <a:rPr lang="en-US" sz="4000" dirty="0"/>
+              <a:t>None of the people working on the project this semester had any web dev experience</a:t>
+            </a:r>
+          </a:p>
+          <a:p>
+            <a:pPr marL="285750" indent="-285750">
+              <a:buFont typeface="Arial" panose="020B0604020202020204" pitchFamily="34" charset="0"/>
+              <a:buChar char="•"/>
+            </a:pPr>
+            <a:r>
+              <a:rPr lang="en-US" sz="4000" dirty="0"/>
+              <a:t>Forward and backwards reasoning is difficult to implement, especially when the code contains if statements</a:t>
+            </a:r>
+          </a:p>
+          <a:p>
+            <a:pPr marL="285750" indent="-285750">
+              <a:buFont typeface="Arial" panose="020B0604020202020204" pitchFamily="34" charset="0"/>
+              <a:buChar char="•"/>
+            </a:pPr>
+            <a:r>
+              <a:rPr lang="en-US" sz="4000" dirty="0"/>
+              <a:t>Simplifying in forward and backwards reasoning is difficult</a:t>
+            </a:r>
+          </a:p>
+          <a:p>
+            <a:pPr marL="285750" indent="-285750">
+              <a:buFont typeface="Arial" panose="020B0604020202020204" pitchFamily="34" charset="0"/>
+              <a:buChar char="•"/>
+            </a:pPr>
+            <a:endParaRPr lang="en-US" sz="4000" dirty="0"/>
           </a:p>
         </p:txBody>
       </p:sp>
@@ -6961,7 +7166,7 @@
           <a:bodyPr/>
           <a:lstStyle/>
           <a:p>
-            <a:endParaRPr lang="en-US"/>
+            <a:endParaRPr lang="en-US" dirty="0"/>
           </a:p>
         </p:txBody>
       </p:sp>
@@ -7006,12 +7211,69 @@
             <p:ph type="body" sz="quarter" idx="96"/>
           </p:nvPr>
         </p:nvSpPr>
-        <p:spPr/>
+        <p:spPr>
+          <a:xfrm>
+            <a:off x="469889" y="17175924"/>
+            <a:ext cx="10056813" cy="8734677"/>
+          </a:xfrm>
+        </p:spPr>
         <p:txBody>
           <a:bodyPr/>
           <a:lstStyle/>
           <a:p>
-            <a:endParaRPr lang="en-US"/>
+            <a:r>
+              <a:rPr lang="en-US" sz="4800" dirty="0"/>
+              <a:t>Front end</a:t>
+            </a:r>
+          </a:p>
+          <a:p>
+            <a:pPr marL="285750" indent="-285750">
+              <a:buFont typeface="Arial" panose="020B0604020202020204" pitchFamily="34" charset="0"/>
+              <a:buChar char="•"/>
+            </a:pPr>
+            <a:r>
+              <a:rPr lang="en-US" sz="4800" dirty="0"/>
+              <a:t>Continue to improve the overall appearance of website</a:t>
+            </a:r>
+          </a:p>
+          <a:p>
+            <a:pPr marL="285750" indent="-285750">
+              <a:buFont typeface="Arial" panose="020B0604020202020204" pitchFamily="34" charset="0"/>
+              <a:buChar char="•"/>
+            </a:pPr>
+            <a:r>
+              <a:rPr lang="en-US" sz="4800" dirty="0"/>
+              <a:t>Finish the pages for design patterns</a:t>
+            </a:r>
+          </a:p>
+          <a:p>
+            <a:r>
+              <a:rPr lang="en-US" sz="4800" dirty="0"/>
+              <a:t>Back end</a:t>
+            </a:r>
+          </a:p>
+          <a:p>
+            <a:pPr marL="285750" indent="-285750">
+              <a:buFont typeface="Arial" panose="020B0604020202020204" pitchFamily="34" charset="0"/>
+              <a:buChar char="•"/>
+            </a:pPr>
+            <a:r>
+              <a:rPr lang="en-US" sz="4800" dirty="0"/>
+              <a:t>Finish forward and backwards reasoning</a:t>
+            </a:r>
+          </a:p>
+          <a:p>
+            <a:pPr marL="285750" indent="-285750">
+              <a:buFont typeface="Arial" panose="020B0604020202020204" pitchFamily="34" charset="0"/>
+              <a:buChar char="•"/>
+            </a:pPr>
+            <a:r>
+              <a:rPr lang="en-US" sz="4800" dirty="0"/>
+              <a:t>Implement CFG generator</a:t>
+            </a:r>
+          </a:p>
+          <a:p>
+            <a:endParaRPr lang="en-US" sz="4800" dirty="0"/>
           </a:p>
         </p:txBody>
       </p:sp>
@@ -7036,7 +7298,10 @@
           <a:bodyPr/>
           <a:lstStyle/>
           <a:p>
-            <a:endParaRPr lang="en-US"/>
+            <a:r>
+              <a:rPr lang="en-US" dirty="0"/>
+              <a:t>RCOS Summer 2024</a:t>
+            </a:r>
           </a:p>
         </p:txBody>
       </p:sp>
@@ -7061,7 +7326,10 @@
           <a:bodyPr/>
           <a:lstStyle/>
           <a:p>
-            <a:endParaRPr lang="en-US" dirty="0"/>
+            <a:r>
+              <a:rPr lang="en-US" dirty="0"/>
+              <a:t>Ryan Carroll, Luke Kissling, Thalia Jackson</a:t>
+            </a:r>
           </a:p>
         </p:txBody>
       </p:sp>
@@ -7086,7 +7354,193 @@
           <a:bodyPr/>
           <a:lstStyle/>
           <a:p>
-            <a:endParaRPr lang="en-US"/>
+            <a:r>
+              <a:rPr lang="en-US" dirty="0"/>
+              <a:t>PSOFT TOOLS</a:t>
+            </a:r>
+          </a:p>
+        </p:txBody>
+      </p:sp>
+      <p:pic>
+        <p:nvPicPr>
+          <p:cNvPr id="20" name="Picture 19">
+            <a:extLst>
+              <a:ext uri="{FF2B5EF4-FFF2-40B4-BE49-F238E27FC236}">
+                <a16:creationId xmlns:a16="http://schemas.microsoft.com/office/drawing/2014/main" id="{666C75F3-F0EA-4F65-AFEC-F59CDF1383C3}"/>
+              </a:ext>
+            </a:extLst>
+          </p:cNvPr>
+          <p:cNvPicPr>
+            <a:picLocks noChangeAspect="1"/>
+          </p:cNvPicPr>
+          <p:nvPr/>
+        </p:nvPicPr>
+        <p:blipFill>
+          <a:blip r:embed="rId2"/>
+          <a:stretch>
+            <a:fillRect/>
+          </a:stretch>
+        </p:blipFill>
+        <p:spPr>
+          <a:xfrm>
+            <a:off x="22707061" y="13235702"/>
+            <a:ext cx="18720380" cy="8565270"/>
+          </a:xfrm>
+          <a:prstGeom prst="rect">
+            <a:avLst/>
+          </a:prstGeom>
+          <a:ln>
+            <a:solidFill>
+              <a:schemeClr val="tx1"/>
+            </a:solidFill>
+          </a:ln>
+        </p:spPr>
+      </p:pic>
+      <p:sp>
+        <p:nvSpPr>
+          <p:cNvPr id="21" name="TextBox 20">
+            <a:extLst>
+              <a:ext uri="{FF2B5EF4-FFF2-40B4-BE49-F238E27FC236}">
+                <a16:creationId xmlns:a16="http://schemas.microsoft.com/office/drawing/2014/main" id="{19C3285C-6F06-524B-D602-50B6B9554FD8}"/>
+              </a:ext>
+            </a:extLst>
+          </p:cNvPr>
+          <p:cNvSpPr txBox="1"/>
+          <p:nvPr/>
+        </p:nvSpPr>
+        <p:spPr>
+          <a:xfrm>
+            <a:off x="14911389" y="24428541"/>
+            <a:ext cx="4419602" cy="830997"/>
+          </a:xfrm>
+          <a:prstGeom prst="rect">
+            <a:avLst/>
+          </a:prstGeom>
+          <a:noFill/>
+        </p:spPr>
+        <p:txBody>
+          <a:bodyPr wrap="square" rtlCol="0">
+            <a:spAutoFit/>
+          </a:bodyPr>
+          <a:lstStyle/>
+          <a:p>
+            <a:r>
+              <a:rPr lang="en-US" sz="4800" dirty="0">
+                <a:latin typeface="Century Gothic" panose="020B0502020202020204" pitchFamily="34" charset="0"/>
+                <a:cs typeface="Times New Roman" panose="02020603050405020304" pitchFamily="18" charset="0"/>
+              </a:rPr>
+              <a:t>Front end</a:t>
+            </a:r>
+          </a:p>
+        </p:txBody>
+      </p:sp>
+      <p:pic>
+        <p:nvPicPr>
+          <p:cNvPr id="25" name="Picture 24" descr="A qr code with a white background&#10;&#10;Description automatically generated">
+            <a:extLst>
+              <a:ext uri="{FF2B5EF4-FFF2-40B4-BE49-F238E27FC236}">
+                <a16:creationId xmlns:a16="http://schemas.microsoft.com/office/drawing/2014/main" id="{72100A89-A616-CABE-5B9E-2675BD7A3B6C}"/>
+              </a:ext>
+            </a:extLst>
+          </p:cNvPr>
+          <p:cNvPicPr>
+            <a:picLocks noChangeAspect="1"/>
+          </p:cNvPicPr>
+          <p:nvPr/>
+        </p:nvPicPr>
+        <p:blipFill>
+          <a:blip r:embed="rId3" cstate="print">
+            <a:extLst>
+              <a:ext uri="{28A0092B-C50C-407E-A947-70E740481C1C}">
+                <a14:useLocalDpi xmlns:a14="http://schemas.microsoft.com/office/drawing/2010/main" val="0"/>
+              </a:ext>
+            </a:extLst>
+          </a:blip>
+          <a:stretch>
+            <a:fillRect/>
+          </a:stretch>
+        </p:blipFill>
+        <p:spPr>
+          <a:xfrm>
+            <a:off x="13354043" y="25094546"/>
+            <a:ext cx="6261109" cy="6261109"/>
+          </a:xfrm>
+          <a:prstGeom prst="rect">
+            <a:avLst/>
+          </a:prstGeom>
+        </p:spPr>
+      </p:pic>
+      <p:pic>
+        <p:nvPicPr>
+          <p:cNvPr id="27" name="Picture 26" descr="A qr code with a white background&#10;&#10;Description automatically generated">
+            <a:extLst>
+              <a:ext uri="{FF2B5EF4-FFF2-40B4-BE49-F238E27FC236}">
+                <a16:creationId xmlns:a16="http://schemas.microsoft.com/office/drawing/2014/main" id="{6A7F1C6D-73E1-B9B0-0A1C-EFA46B8F2D91}"/>
+              </a:ext>
+            </a:extLst>
+          </p:cNvPr>
+          <p:cNvPicPr>
+            <a:picLocks noChangeAspect="1"/>
+          </p:cNvPicPr>
+          <p:nvPr/>
+        </p:nvPicPr>
+        <p:blipFill>
+          <a:blip r:embed="rId4" cstate="print">
+            <a:extLst>
+              <a:ext uri="{28A0092B-C50C-407E-A947-70E740481C1C}">
+                <a14:useLocalDpi xmlns:a14="http://schemas.microsoft.com/office/drawing/2010/main" val="0"/>
+              </a:ext>
+            </a:extLst>
+          </a:blip>
+          <a:stretch>
+            <a:fillRect/>
+          </a:stretch>
+        </p:blipFill>
+        <p:spPr>
+          <a:xfrm>
+            <a:off x="22190923" y="25084440"/>
+            <a:ext cx="6261109" cy="6261109"/>
+          </a:xfrm>
+          <a:prstGeom prst="rect">
+            <a:avLst/>
+          </a:prstGeom>
+        </p:spPr>
+      </p:pic>
+      <p:sp>
+        <p:nvSpPr>
+          <p:cNvPr id="28" name="TextBox 27">
+            <a:extLst>
+              <a:ext uri="{FF2B5EF4-FFF2-40B4-BE49-F238E27FC236}">
+                <a16:creationId xmlns:a16="http://schemas.microsoft.com/office/drawing/2014/main" id="{BB4B63C7-D253-3A9A-0607-7B841BD67017}"/>
+              </a:ext>
+            </a:extLst>
+          </p:cNvPr>
+          <p:cNvSpPr txBox="1"/>
+          <p:nvPr/>
+        </p:nvSpPr>
+        <p:spPr>
+          <a:xfrm>
+            <a:off x="23804875" y="24441406"/>
+            <a:ext cx="3033203" cy="830997"/>
+          </a:xfrm>
+          <a:prstGeom prst="rect">
+            <a:avLst/>
+          </a:prstGeom>
+          <a:noFill/>
+        </p:spPr>
+        <p:txBody>
+          <a:bodyPr wrap="none" rtlCol="0">
+            <a:spAutoFit/>
+          </a:bodyPr>
+          <a:lstStyle/>
+          <a:p>
+            <a:r>
+              <a:rPr lang="en-US" sz="4800" dirty="0">
+                <a:latin typeface="Century Gothic" panose="020B0502020202020204" pitchFamily="34" charset="0"/>
+                <a:cs typeface="Times New Roman" panose="02020603050405020304" pitchFamily="18" charset="0"/>
+              </a:rPr>
+              <a:t>Back end</a:t>
+            </a:r>
           </a:p>
         </p:txBody>
       </p:sp>
